--- a/materials/2026/slides/kcl-frontend-2026-handson-ans.pptx
+++ b/materials/2026/slides/kcl-frontend-2026-handson-ans.pptx
@@ -14963,7 +14963,7 @@
         <p:spPr>
           <a:xfrm>
             <a:off x="514350" y="2895600"/>
-            <a:ext cx="6438900" cy="2724150"/>
+            <a:ext cx="6438900" cy="3086100"/>
           </a:xfrm>
           <a:prstGeom prst="rect">
             <a:avLst/>
@@ -15101,15 +15101,26 @@
               </a:defRPr>
             </a:pPr>
             <a:r>
-              <a:rPr sz="1125" b="0">
-                <a:solidFill>
-                  <a:srgbClr val="F6F8FB"/>
-                </a:solidFill>
-                <a:latin typeface="Aptos Mono"/>
-                <a:ea typeface="Aptos Mono"/>
-                <a:cs typeface="Aptos Mono"/>
-              </a:rPr>
-              <a:t>products.map((product) =&gt; {</a:t>
+              <a:rPr sz="1125" b="0" dirty="0" err="1">
+                <a:solidFill>
+                  <a:srgbClr val="F6F8FB"/>
+                </a:solidFill>
+                <a:latin typeface="Aptos Mono"/>
+                <a:ea typeface="Aptos Mono"/>
+                <a:cs typeface="Aptos Mono"/>
+              </a:rPr>
+              <a:t>products.map</a:t>
+            </a:r>
+            <a:r>
+              <a:rPr sz="1125" b="0" dirty="0">
+                <a:solidFill>
+                  <a:srgbClr val="F6F8FB"/>
+                </a:solidFill>
+                <a:latin typeface="Aptos Mono"/>
+                <a:ea typeface="Aptos Mono"/>
+                <a:cs typeface="Aptos Mono"/>
+              </a:rPr>
+              <a:t>((product) =&gt; {</a:t>
             </a:r>
           </a:p>
           <a:p>
@@ -15124,15 +15135,103 @@
               </a:defRPr>
             </a:pPr>
             <a:r>
-              <a:rPr sz="1125" b="0">
-                <a:solidFill>
-                  <a:srgbClr val="F6F8FB"/>
-                </a:solidFill>
-                <a:latin typeface="Aptos Mono"/>
-                <a:ea typeface="Aptos Mono"/>
-                <a:cs typeface="Aptos Mono"/>
-              </a:rPr>
-              <a:t>  const cartItem = cartItems.find((item) =&gt; item.productId === product.id);</a:t>
+              <a:rPr sz="1125" b="0" dirty="0">
+                <a:solidFill>
+                  <a:srgbClr val="F6F8FB"/>
+                </a:solidFill>
+                <a:latin typeface="Aptos Mono"/>
+                <a:ea typeface="Aptos Mono"/>
+                <a:cs typeface="Aptos Mono"/>
+              </a:rPr>
+              <a:t>  const </a:t>
+            </a:r>
+            <a:r>
+              <a:rPr sz="1125" b="0" dirty="0" err="1">
+                <a:solidFill>
+                  <a:srgbClr val="F6F8FB"/>
+                </a:solidFill>
+                <a:latin typeface="Aptos Mono"/>
+                <a:ea typeface="Aptos Mono"/>
+                <a:cs typeface="Aptos Mono"/>
+              </a:rPr>
+              <a:t>cartItem</a:t>
+            </a:r>
+            <a:r>
+              <a:rPr sz="1125" b="0" dirty="0">
+                <a:solidFill>
+                  <a:srgbClr val="F6F8FB"/>
+                </a:solidFill>
+                <a:latin typeface="Aptos Mono"/>
+                <a:ea typeface="Aptos Mono"/>
+                <a:cs typeface="Aptos Mono"/>
+              </a:rPr>
+              <a:t> = </a:t>
+            </a:r>
+            <a:r>
+              <a:rPr sz="1125" b="0" dirty="0" err="1">
+                <a:solidFill>
+                  <a:srgbClr val="F6F8FB"/>
+                </a:solidFill>
+                <a:latin typeface="Aptos Mono"/>
+                <a:ea typeface="Aptos Mono"/>
+                <a:cs typeface="Aptos Mono"/>
+              </a:rPr>
+              <a:t>cartItems.find</a:t>
+            </a:r>
+            <a:r>
+              <a:rPr sz="1125" b="0" dirty="0">
+                <a:solidFill>
+                  <a:srgbClr val="F6F8FB"/>
+                </a:solidFill>
+                <a:latin typeface="Aptos Mono"/>
+                <a:ea typeface="Aptos Mono"/>
+                <a:cs typeface="Aptos Mono"/>
+              </a:rPr>
+              <a:t>((item) =&gt; </a:t>
+            </a:r>
+            <a:r>
+              <a:rPr sz="1125" b="0" dirty="0" err="1">
+                <a:solidFill>
+                  <a:srgbClr val="F6F8FB"/>
+                </a:solidFill>
+                <a:latin typeface="Aptos Mono"/>
+                <a:ea typeface="Aptos Mono"/>
+                <a:cs typeface="Aptos Mono"/>
+              </a:rPr>
+              <a:t>item.productId</a:t>
+            </a:r>
+            <a:r>
+              <a:rPr sz="1125" b="0" dirty="0">
+                <a:solidFill>
+                  <a:srgbClr val="F6F8FB"/>
+                </a:solidFill>
+                <a:latin typeface="Aptos Mono"/>
+                <a:ea typeface="Aptos Mono"/>
+                <a:cs typeface="Aptos Mono"/>
+              </a:rPr>
+              <a:t> === </a:t>
+            </a:r>
+            <a:r>
+              <a:rPr sz="1125" b="0" dirty="0" err="1">
+                <a:solidFill>
+                  <a:srgbClr val="F6F8FB"/>
+                </a:solidFill>
+                <a:latin typeface="Aptos Mono"/>
+                <a:ea typeface="Aptos Mono"/>
+                <a:cs typeface="Aptos Mono"/>
+              </a:rPr>
+              <a:t>product.id</a:t>
+            </a:r>
+            <a:r>
+              <a:rPr sz="1125" b="0" dirty="0">
+                <a:solidFill>
+                  <a:srgbClr val="F6F8FB"/>
+                </a:solidFill>
+                <a:latin typeface="Aptos Mono"/>
+                <a:ea typeface="Aptos Mono"/>
+                <a:cs typeface="Aptos Mono"/>
+              </a:rPr>
+              <a:t>);</a:t>
             </a:r>
           </a:p>
           <a:p>
@@ -15147,19 +15246,85 @@
               </a:defRPr>
             </a:pPr>
             <a:r>
-              <a:rPr sz="1125" b="0">
-                <a:solidFill>
-                  <a:srgbClr val="F6F8FB"/>
-                </a:solidFill>
-                <a:latin typeface="Aptos Mono"/>
-                <a:ea typeface="Aptos Mono"/>
-                <a:cs typeface="Aptos Mono"/>
-              </a:rPr>
-              <a:t>  const isFavorite = favoriteIds.includes(product.id);</a:t>
-            </a:r>
-          </a:p>
-          <a:p>
-            <a:endParaRPr sz="1125" b="0">
+              <a:rPr sz="1125" b="0" dirty="0">
+                <a:solidFill>
+                  <a:srgbClr val="F6F8FB"/>
+                </a:solidFill>
+                <a:latin typeface="Aptos Mono"/>
+                <a:ea typeface="Aptos Mono"/>
+                <a:cs typeface="Aptos Mono"/>
+              </a:rPr>
+              <a:t>  const </a:t>
+            </a:r>
+            <a:r>
+              <a:rPr sz="1125" b="0" dirty="0" err="1">
+                <a:solidFill>
+                  <a:srgbClr val="F6F8FB"/>
+                </a:solidFill>
+                <a:latin typeface="Aptos Mono"/>
+                <a:ea typeface="Aptos Mono"/>
+                <a:cs typeface="Aptos Mono"/>
+              </a:rPr>
+              <a:t>isFavorite</a:t>
+            </a:r>
+            <a:r>
+              <a:rPr sz="1125" b="0" dirty="0">
+                <a:solidFill>
+                  <a:srgbClr val="F6F8FB"/>
+                </a:solidFill>
+                <a:latin typeface="Aptos Mono"/>
+                <a:ea typeface="Aptos Mono"/>
+                <a:cs typeface="Aptos Mono"/>
+              </a:rPr>
+              <a:t> = </a:t>
+            </a:r>
+            <a:r>
+              <a:rPr sz="1125" b="0" dirty="0" err="1">
+                <a:solidFill>
+                  <a:srgbClr val="F6F8FB"/>
+                </a:solidFill>
+                <a:latin typeface="Aptos Mono"/>
+                <a:ea typeface="Aptos Mono"/>
+                <a:cs typeface="Aptos Mono"/>
+              </a:rPr>
+              <a:t>favoriteIds.includes</a:t>
+            </a:r>
+            <a:r>
+              <a:rPr sz="1125" b="0" dirty="0">
+                <a:solidFill>
+                  <a:srgbClr val="F6F8FB"/>
+                </a:solidFill>
+                <a:latin typeface="Aptos Mono"/>
+                <a:ea typeface="Aptos Mono"/>
+                <a:cs typeface="Aptos Mono"/>
+              </a:rPr>
+              <a:t>(</a:t>
+            </a:r>
+            <a:r>
+              <a:rPr sz="1125" b="0" dirty="0" err="1">
+                <a:solidFill>
+                  <a:srgbClr val="F6F8FB"/>
+                </a:solidFill>
+                <a:latin typeface="Aptos Mono"/>
+                <a:ea typeface="Aptos Mono"/>
+                <a:cs typeface="Aptos Mono"/>
+              </a:rPr>
+              <a:t>product.id</a:t>
+            </a:r>
+            <a:r>
+              <a:rPr sz="1125" b="0" dirty="0">
+                <a:solidFill>
+                  <a:srgbClr val="F6F8FB"/>
+                </a:solidFill>
+                <a:latin typeface="Aptos Mono"/>
+                <a:ea typeface="Aptos Mono"/>
+                <a:cs typeface="Aptos Mono"/>
+              </a:rPr>
+              <a:t>);</a:t>
+            </a:r>
+          </a:p>
+          <a:p>
+            <a:endParaRPr sz="1125" b="0" dirty="0">
               <a:solidFill>
                 <a:srgbClr val="F6F8FB"/>
               </a:solidFill>
@@ -15180,7 +15345,7 @@
               </a:defRPr>
             </a:pPr>
             <a:r>
-              <a:rPr sz="1125" b="0">
+              <a:rPr sz="1125" b="0" dirty="0">
                 <a:solidFill>
                   <a:srgbClr val="F6F8FB"/>
                 </a:solidFill>
@@ -15203,16 +15368,35 @@
               </a:defRPr>
             </a:pPr>
             <a:r>
-              <a:rPr sz="1125" b="0">
-                <a:solidFill>
-                  <a:srgbClr val="F6F8FB"/>
-                </a:solidFill>
-                <a:latin typeface="Aptos Mono"/>
-                <a:ea typeface="Aptos Mono"/>
-                <a:cs typeface="Aptos Mono"/>
-              </a:rPr>
-              <a:t>    &lt;ProductCard</a:t>
-            </a:r>
+              <a:rPr sz="1125" b="0" dirty="0">
+                <a:solidFill>
+                  <a:srgbClr val="F6F8FB"/>
+                </a:solidFill>
+                <a:latin typeface="Aptos Mono"/>
+                <a:ea typeface="Aptos Mono"/>
+                <a:cs typeface="Aptos Mono"/>
+              </a:rPr>
+              <a:t>    &lt;</a:t>
+            </a:r>
+            <a:r>
+              <a:rPr sz="1125" b="0" dirty="0" err="1">
+                <a:solidFill>
+                  <a:srgbClr val="F6F8FB"/>
+                </a:solidFill>
+                <a:latin typeface="Aptos Mono"/>
+                <a:ea typeface="Aptos Mono"/>
+                <a:cs typeface="Aptos Mono"/>
+              </a:rPr>
+              <a:t>ProductCard</a:t>
+            </a:r>
+            <a:endParaRPr sz="1125" b="0" dirty="0">
+              <a:solidFill>
+                <a:srgbClr val="F6F8FB"/>
+              </a:solidFill>
+              <a:latin typeface="Aptos Mono"/>
+              <a:ea typeface="Aptos Mono"/>
+              <a:cs typeface="Aptos Mono"/>
+            </a:endParaRPr>
           </a:p>
           <a:p>
             <a:pPr algn="l">
@@ -15226,15 +15410,37 @@
               </a:defRPr>
             </a:pPr>
             <a:r>
-              <a:rPr sz="1125" b="0">
-                <a:solidFill>
-                  <a:srgbClr val="F6F8FB"/>
-                </a:solidFill>
-                <a:latin typeface="Aptos Mono"/>
-                <a:ea typeface="Aptos Mono"/>
-                <a:cs typeface="Aptos Mono"/>
-              </a:rPr>
-              <a:t>      key={product.id}</a:t>
+              <a:rPr sz="1125" b="0" dirty="0">
+                <a:solidFill>
+                  <a:srgbClr val="F6F8FB"/>
+                </a:solidFill>
+                <a:latin typeface="Aptos Mono"/>
+                <a:ea typeface="Aptos Mono"/>
+                <a:cs typeface="Aptos Mono"/>
+              </a:rPr>
+              <a:t>      key={</a:t>
+            </a:r>
+            <a:r>
+              <a:rPr sz="1125" b="0" dirty="0" err="1">
+                <a:solidFill>
+                  <a:srgbClr val="F6F8FB"/>
+                </a:solidFill>
+                <a:latin typeface="Aptos Mono"/>
+                <a:ea typeface="Aptos Mono"/>
+                <a:cs typeface="Aptos Mono"/>
+              </a:rPr>
+              <a:t>product.id</a:t>
+            </a:r>
+            <a:r>
+              <a:rPr sz="1125" b="0" dirty="0">
+                <a:solidFill>
+                  <a:srgbClr val="F6F8FB"/>
+                </a:solidFill>
+                <a:latin typeface="Aptos Mono"/>
+                <a:ea typeface="Aptos Mono"/>
+                <a:cs typeface="Aptos Mono"/>
+              </a:rPr>
+              <a:t>}</a:t>
             </a:r>
           </a:p>
           <a:p>
@@ -15249,7 +15455,7 @@
               </a:defRPr>
             </a:pPr>
             <a:r>
-              <a:rPr sz="1125" b="0">
+              <a:rPr sz="1125" b="0" dirty="0">
                 <a:solidFill>
                   <a:srgbClr val="F6F8FB"/>
                 </a:solidFill>
@@ -15272,15 +15478,59 @@
               </a:defRPr>
             </a:pPr>
             <a:r>
-              <a:rPr sz="1125" b="0">
-                <a:solidFill>
-                  <a:srgbClr val="F6F8FB"/>
-                </a:solidFill>
-                <a:latin typeface="Aptos Mono"/>
-                <a:ea typeface="Aptos Mono"/>
-                <a:cs typeface="Aptos Mono"/>
-              </a:rPr>
-              <a:t>      cartQuantity={cartItem?.quantity ?? 0}</a:t>
+              <a:rPr sz="1125" b="0" dirty="0">
+                <a:solidFill>
+                  <a:srgbClr val="F6F8FB"/>
+                </a:solidFill>
+                <a:latin typeface="Aptos Mono"/>
+                <a:ea typeface="Aptos Mono"/>
+                <a:cs typeface="Aptos Mono"/>
+              </a:rPr>
+              <a:t>      </a:t>
+            </a:r>
+            <a:r>
+              <a:rPr sz="1125" b="0" dirty="0" err="1">
+                <a:solidFill>
+                  <a:srgbClr val="F6F8FB"/>
+                </a:solidFill>
+                <a:latin typeface="Aptos Mono"/>
+                <a:ea typeface="Aptos Mono"/>
+                <a:cs typeface="Aptos Mono"/>
+              </a:rPr>
+              <a:t>cartQuantity</a:t>
+            </a:r>
+            <a:r>
+              <a:rPr sz="1125" b="0" dirty="0">
+                <a:solidFill>
+                  <a:srgbClr val="F6F8FB"/>
+                </a:solidFill>
+                <a:latin typeface="Aptos Mono"/>
+                <a:ea typeface="Aptos Mono"/>
+                <a:cs typeface="Aptos Mono"/>
+              </a:rPr>
+              <a:t>={</a:t>
+            </a:r>
+            <a:r>
+              <a:rPr sz="1125" b="0" dirty="0" err="1">
+                <a:solidFill>
+                  <a:srgbClr val="F6F8FB"/>
+                </a:solidFill>
+                <a:latin typeface="Aptos Mono"/>
+                <a:ea typeface="Aptos Mono"/>
+                <a:cs typeface="Aptos Mono"/>
+              </a:rPr>
+              <a:t>cartItem</a:t>
+            </a:r>
+            <a:r>
+              <a:rPr sz="1125" b="0" dirty="0">
+                <a:solidFill>
+                  <a:srgbClr val="F6F8FB"/>
+                </a:solidFill>
+                <a:latin typeface="Aptos Mono"/>
+                <a:ea typeface="Aptos Mono"/>
+                <a:cs typeface="Aptos Mono"/>
+              </a:rPr>
+              <a:t>?.quantity ?? 0}</a:t>
             </a:r>
           </a:p>
           <a:p>
@@ -15295,16 +15545,68 @@
               </a:defRPr>
             </a:pPr>
             <a:r>
-              <a:rPr sz="1125" b="0">
-                <a:solidFill>
-                  <a:srgbClr val="F6F8FB"/>
-                </a:solidFill>
-                <a:latin typeface="Aptos Mono"/>
-                <a:ea typeface="Aptos Mono"/>
-                <a:cs typeface="Aptos Mono"/>
-              </a:rPr>
-              <a:t>      isFavorite={isFavorite}</a:t>
-            </a:r>
+              <a:rPr sz="1125" b="0" dirty="0">
+                <a:solidFill>
+                  <a:srgbClr val="F6F8FB"/>
+                </a:solidFill>
+                <a:latin typeface="Aptos Mono"/>
+                <a:ea typeface="Aptos Mono"/>
+                <a:cs typeface="Aptos Mono"/>
+              </a:rPr>
+              <a:t>      </a:t>
+            </a:r>
+            <a:r>
+              <a:rPr sz="1125" b="0" dirty="0" err="1">
+                <a:solidFill>
+                  <a:srgbClr val="F6F8FB"/>
+                </a:solidFill>
+                <a:latin typeface="Aptos Mono"/>
+                <a:ea typeface="Aptos Mono"/>
+                <a:cs typeface="Aptos Mono"/>
+              </a:rPr>
+              <a:t>isFavorite</a:t>
+            </a:r>
+            <a:r>
+              <a:rPr sz="1125" b="0" dirty="0">
+                <a:solidFill>
+                  <a:srgbClr val="F6F8FB"/>
+                </a:solidFill>
+                <a:latin typeface="Aptos Mono"/>
+                <a:ea typeface="Aptos Mono"/>
+                <a:cs typeface="Aptos Mono"/>
+              </a:rPr>
+              <a:t>={</a:t>
+            </a:r>
+            <a:r>
+              <a:rPr sz="1125" b="0" dirty="0" err="1">
+                <a:solidFill>
+                  <a:srgbClr val="F6F8FB"/>
+                </a:solidFill>
+                <a:latin typeface="Aptos Mono"/>
+                <a:ea typeface="Aptos Mono"/>
+                <a:cs typeface="Aptos Mono"/>
+              </a:rPr>
+              <a:t>isFavorite</a:t>
+            </a:r>
+            <a:r>
+              <a:rPr sz="1125" b="0" dirty="0">
+                <a:solidFill>
+                  <a:srgbClr val="F6F8FB"/>
+                </a:solidFill>
+                <a:latin typeface="Aptos Mono"/>
+                <a:ea typeface="Aptos Mono"/>
+                <a:cs typeface="Aptos Mono"/>
+              </a:rPr>
+              <a:t>}</a:t>
+            </a:r>
+            <a:endParaRPr lang="en-US" sz="1125" dirty="0">
+              <a:solidFill>
+                <a:srgbClr val="F6F8FB"/>
+              </a:solidFill>
+              <a:latin typeface="Aptos Mono"/>
+              <a:ea typeface="Aptos Mono"/>
+              <a:cs typeface="Aptos Mono"/>
+            </a:endParaRPr>
           </a:p>
           <a:p>
             <a:pPr algn="l">
@@ -15318,7 +15620,149 @@
               </a:defRPr>
             </a:pPr>
             <a:r>
-              <a:rPr sz="1125" b="0">
+              <a:rPr lang="en-US" sz="1125" dirty="0">
+                <a:solidFill>
+                  <a:srgbClr val="F6F8FB"/>
+                </a:solidFill>
+                <a:latin typeface="Aptos Mono"/>
+                <a:ea typeface="Aptos Mono"/>
+                <a:cs typeface="Aptos Mono"/>
+              </a:rPr>
+              <a:t>      </a:t>
+            </a:r>
+            <a:r>
+              <a:rPr lang="en-US" sz="1125" dirty="0" err="1">
+                <a:solidFill>
+                  <a:srgbClr val="F6F8FB"/>
+                </a:solidFill>
+                <a:latin typeface="Aptos Mono"/>
+                <a:ea typeface="Aptos Mono"/>
+                <a:cs typeface="Aptos Mono"/>
+              </a:rPr>
+              <a:t>onAddToCart</a:t>
+            </a:r>
+            <a:r>
+              <a:rPr lang="en-US" sz="1125" dirty="0">
+                <a:solidFill>
+                  <a:srgbClr val="F6F8FB"/>
+                </a:solidFill>
+                <a:latin typeface="Aptos Mono"/>
+                <a:ea typeface="Aptos Mono"/>
+                <a:cs typeface="Aptos Mono"/>
+              </a:rPr>
+              <a:t>={</a:t>
+            </a:r>
+            <a:r>
+              <a:rPr lang="en-US" sz="1125" dirty="0" err="1">
+                <a:solidFill>
+                  <a:srgbClr val="F6F8FB"/>
+                </a:solidFill>
+                <a:latin typeface="Aptos Mono"/>
+                <a:ea typeface="Aptos Mono"/>
+                <a:cs typeface="Aptos Mono"/>
+              </a:rPr>
+              <a:t>onAddToCart</a:t>
+            </a:r>
+            <a:r>
+              <a:rPr lang="en-US" sz="1125" dirty="0">
+                <a:solidFill>
+                  <a:srgbClr val="F6F8FB"/>
+                </a:solidFill>
+                <a:latin typeface="Aptos Mono"/>
+                <a:ea typeface="Aptos Mono"/>
+                <a:cs typeface="Aptos Mono"/>
+              </a:rPr>
+              <a:t>}</a:t>
+            </a:r>
+          </a:p>
+          <a:p>
+            <a:pPr>
+              <a:defRPr sz="1125" b="0">
+                <a:solidFill>
+                  <a:srgbClr val="F6F8FB"/>
+                </a:solidFill>
+                <a:latin typeface="Aptos Mono"/>
+                <a:ea typeface="Aptos Mono"/>
+                <a:cs typeface="Aptos Mono"/>
+              </a:defRPr>
+            </a:pPr>
+            <a:r>
+              <a:rPr lang="en-US" sz="1125" b="0" dirty="0">
+                <a:solidFill>
+                  <a:srgbClr val="F6F8FB"/>
+                </a:solidFill>
+                <a:latin typeface="Aptos Mono"/>
+                <a:ea typeface="Aptos Mono"/>
+                <a:cs typeface="Aptos Mono"/>
+              </a:rPr>
+              <a:t>      </a:t>
+            </a:r>
+            <a:r>
+              <a:rPr lang="en-US" sz="1125" dirty="0" err="1">
+                <a:solidFill>
+                  <a:srgbClr val="F6F8FB"/>
+                </a:solidFill>
+                <a:latin typeface="Aptos Mono"/>
+                <a:ea typeface="Aptos Mono"/>
+                <a:cs typeface="Aptos Mono"/>
+              </a:rPr>
+              <a:t>onToggleFavorite</a:t>
+            </a:r>
+            <a:r>
+              <a:rPr lang="en-US" sz="1125" dirty="0">
+                <a:solidFill>
+                  <a:srgbClr val="F6F8FB"/>
+                </a:solidFill>
+                <a:latin typeface="Aptos Mono"/>
+                <a:ea typeface="Aptos Mono"/>
+                <a:cs typeface="Aptos Mono"/>
+              </a:rPr>
+              <a:t>={</a:t>
+            </a:r>
+            <a:r>
+              <a:rPr lang="en-US" sz="1125" dirty="0" err="1">
+                <a:solidFill>
+                  <a:srgbClr val="F6F8FB"/>
+                </a:solidFill>
+                <a:latin typeface="Aptos Mono"/>
+                <a:ea typeface="Aptos Mono"/>
+                <a:cs typeface="Aptos Mono"/>
+              </a:rPr>
+              <a:t>onToggleFavorite</a:t>
+            </a:r>
+            <a:r>
+              <a:rPr lang="en-US" sz="1125" dirty="0">
+                <a:solidFill>
+                  <a:srgbClr val="F6F8FB"/>
+                </a:solidFill>
+                <a:latin typeface="Aptos Mono"/>
+                <a:ea typeface="Aptos Mono"/>
+                <a:cs typeface="Aptos Mono"/>
+              </a:rPr>
+              <a:t>}</a:t>
+            </a:r>
+            <a:endParaRPr sz="1125" b="0" dirty="0">
+              <a:solidFill>
+                <a:srgbClr val="F6F8FB"/>
+              </a:solidFill>
+              <a:latin typeface="Aptos Mono"/>
+              <a:ea typeface="Aptos Mono"/>
+              <a:cs typeface="Aptos Mono"/>
+            </a:endParaRPr>
+          </a:p>
+          <a:p>
+            <a:pPr algn="l">
+              <a:defRPr sz="1125" b="0">
+                <a:solidFill>
+                  <a:srgbClr val="F6F8FB"/>
+                </a:solidFill>
+                <a:latin typeface="Aptos Mono"/>
+                <a:ea typeface="Aptos Mono"/>
+                <a:cs typeface="Aptos Mono"/>
+              </a:defRPr>
+            </a:pPr>
+            <a:r>
+              <a:rPr sz="1125" b="0" dirty="0">
                 <a:solidFill>
                   <a:srgbClr val="F6F8FB"/>
                 </a:solidFill>
@@ -15341,7 +15785,7 @@
               </a:defRPr>
             </a:pPr>
             <a:r>
-              <a:rPr sz="1125" b="0">
+              <a:rPr sz="1125" b="0" dirty="0">
                 <a:solidFill>
                   <a:srgbClr val="F6F8FB"/>
                 </a:solidFill>
@@ -15364,7 +15808,7 @@
               </a:defRPr>
             </a:pPr>
             <a:r>
-              <a:rPr sz="1125" b="0">
+              <a:rPr sz="1125" b="0" dirty="0">
                 <a:solidFill>
                   <a:srgbClr val="F6F8FB"/>
                 </a:solidFill>
